--- a/catalog/samples/agenda_separator.pptx
+++ b/catalog/samples/agenda_separator.pptx
@@ -1222,7 +1222,7 @@
           </a:p>
           <a:p>
             <a:r>
-              <a:t>  "template_sha256": "b80e908821178dde8f54648b958981c9b8b63916f0b33ad65b977380bf65a88d"</a:t>
+              <a:t>  "template_sha256": "fd74a4c51a5b4208ccf52a50c7d9bc4b4dc6efa3ad8414c7cce6b850e9fb2a49"</a:t>
             </a:r>
           </a:p>
           <a:p>
